--- a/構成図.pptx
+++ b/構成図.pptx
@@ -176,7 +176,7 @@
 <file path=ppt/revisionInfo.xml><?xml version="1.0" encoding="utf-8"?>
 <p1510:revInfo xmlns:a="http://schemas.openxmlformats.org/drawingml/2006/main" xmlns:r="http://schemas.openxmlformats.org/officeDocument/2006/relationships" xmlns:p1510="http://schemas.microsoft.com/office/powerpoint/2015/10/main">
   <p1510:revLst>
-    <p1510:client id="{99D799A5-0510-49E0-A558-969352B1C8DC}" v="1" dt="2026-06-12T01:30:44.699"/>
+    <p1510:client id="{99D799A5-0510-49E0-A558-969352B1C8DC}" v="3" dt="2026-06-12T04:27:34.483"/>
   </p1510:revLst>
 </p1510:revInfo>
 </file>
@@ -186,10 +186,105 @@
   <pc:docChgLst>
     <pc:chgData name="城谷 匠" userId="afbae57c-d4ca-4e58-bc9a-6f765e208d89" providerId="ADAL" clId="{FD963559-32B2-43B7-8F97-A1E47AC731FA}"/>
     <pc:docChg chg="undo custSel modSld delMainMaster">
-      <pc:chgData name="城谷 匠" userId="afbae57c-d4ca-4e58-bc9a-6f765e208d89" providerId="ADAL" clId="{FD963559-32B2-43B7-8F97-A1E47AC731FA}" dt="2026-06-12T01:30:55.667" v="10" actId="27636"/>
+      <pc:chgData name="城谷 匠" userId="afbae57c-d4ca-4e58-bc9a-6f765e208d89" providerId="ADAL" clId="{FD963559-32B2-43B7-8F97-A1E47AC731FA}" dt="2026-06-12T04:27:37.875" v="15" actId="208"/>
       <pc:docMkLst>
         <pc:docMk/>
       </pc:docMkLst>
+      <pc:sldChg chg="addSp delSp modSp mod">
+        <pc:chgData name="城谷 匠" userId="afbae57c-d4ca-4e58-bc9a-6f765e208d89" providerId="ADAL" clId="{FD963559-32B2-43B7-8F97-A1E47AC731FA}" dt="2026-06-12T04:27:37.875" v="15" actId="208"/>
+        <pc:sldMkLst>
+          <pc:docMk/>
+          <pc:sldMk cId="1156372304" sldId="256"/>
+        </pc:sldMkLst>
+        <pc:spChg chg="mod topLvl">
+          <ac:chgData name="城谷 匠" userId="afbae57c-d4ca-4e58-bc9a-6f765e208d89" providerId="ADAL" clId="{FD963559-32B2-43B7-8F97-A1E47AC731FA}" dt="2026-06-12T04:27:18.499" v="11" actId="165"/>
+          <ac:spMkLst>
+            <pc:docMk/>
+            <pc:sldMk cId="1156372304" sldId="256"/>
+            <ac:spMk id="17" creationId="{2E87E127-501D-495F-6FC0-34B4F7E95A68}"/>
+          </ac:spMkLst>
+        </pc:spChg>
+        <pc:spChg chg="mod topLvl">
+          <ac:chgData name="城谷 匠" userId="afbae57c-d4ca-4e58-bc9a-6f765e208d89" providerId="ADAL" clId="{FD963559-32B2-43B7-8F97-A1E47AC731FA}" dt="2026-06-12T04:27:18.499" v="11" actId="165"/>
+          <ac:spMkLst>
+            <pc:docMk/>
+            <pc:sldMk cId="1156372304" sldId="256"/>
+            <ac:spMk id="18" creationId="{08AD9044-79AA-2BF3-A59C-139D0BB2000A}"/>
+          </ac:spMkLst>
+        </pc:spChg>
+        <pc:spChg chg="mod topLvl">
+          <ac:chgData name="城谷 匠" userId="afbae57c-d4ca-4e58-bc9a-6f765e208d89" providerId="ADAL" clId="{FD963559-32B2-43B7-8F97-A1E47AC731FA}" dt="2026-06-12T04:27:18.499" v="11" actId="165"/>
+          <ac:spMkLst>
+            <pc:docMk/>
+            <pc:sldMk cId="1156372304" sldId="256"/>
+            <ac:spMk id="20" creationId="{F04A8B08-D24B-99DB-FEEB-E5098440177B}"/>
+          </ac:spMkLst>
+        </pc:spChg>
+        <pc:spChg chg="mod topLvl">
+          <ac:chgData name="城谷 匠" userId="afbae57c-d4ca-4e58-bc9a-6f765e208d89" providerId="ADAL" clId="{FD963559-32B2-43B7-8F97-A1E47AC731FA}" dt="2026-06-12T04:27:18.499" v="11" actId="165"/>
+          <ac:spMkLst>
+            <pc:docMk/>
+            <pc:sldMk cId="1156372304" sldId="256"/>
+            <ac:spMk id="21" creationId="{4BDE2633-1D8E-EEA2-C61D-06E780C19E46}"/>
+          </ac:spMkLst>
+        </pc:spChg>
+        <pc:spChg chg="mod topLvl">
+          <ac:chgData name="城谷 匠" userId="afbae57c-d4ca-4e58-bc9a-6f765e208d89" providerId="ADAL" clId="{FD963559-32B2-43B7-8F97-A1E47AC731FA}" dt="2026-06-12T04:27:18.499" v="11" actId="165"/>
+          <ac:spMkLst>
+            <pc:docMk/>
+            <pc:sldMk cId="1156372304" sldId="256"/>
+            <ac:spMk id="22" creationId="{5122F321-7C0D-8ED7-4C52-DBDFCA3C5BC0}"/>
+          </ac:spMkLst>
+        </pc:spChg>
+        <pc:spChg chg="mod topLvl">
+          <ac:chgData name="城谷 匠" userId="afbae57c-d4ca-4e58-bc9a-6f765e208d89" providerId="ADAL" clId="{FD963559-32B2-43B7-8F97-A1E47AC731FA}" dt="2026-06-12T04:27:18.499" v="11" actId="165"/>
+          <ac:spMkLst>
+            <pc:docMk/>
+            <pc:sldMk cId="1156372304" sldId="256"/>
+            <ac:spMk id="23" creationId="{E0FAB9D4-8F6A-64C2-8D67-9132DA54ED87}"/>
+          </ac:spMkLst>
+        </pc:spChg>
+        <pc:picChg chg="mod topLvl">
+          <ac:chgData name="城谷 匠" userId="afbae57c-d4ca-4e58-bc9a-6f765e208d89" providerId="ADAL" clId="{FD963559-32B2-43B7-8F97-A1E47AC731FA}" dt="2026-06-12T04:27:18.499" v="11" actId="165"/>
+          <ac:picMkLst>
+            <pc:docMk/>
+            <pc:sldMk cId="1156372304" sldId="256"/>
+            <ac:picMk id="5" creationId="{B3880868-382E-4AC9-32F7-F28691D35BEA}"/>
+          </ac:picMkLst>
+        </pc:picChg>
+        <pc:picChg chg="mod topLvl">
+          <ac:chgData name="城谷 匠" userId="afbae57c-d4ca-4e58-bc9a-6f765e208d89" providerId="ADAL" clId="{FD963559-32B2-43B7-8F97-A1E47AC731FA}" dt="2026-06-12T04:27:18.499" v="11" actId="165"/>
+          <ac:picMkLst>
+            <pc:docMk/>
+            <pc:sldMk cId="1156372304" sldId="256"/>
+            <ac:picMk id="6" creationId="{97A09EAD-F0F0-5E7F-5DF7-7BA0A63C6513}"/>
+          </ac:picMkLst>
+        </pc:picChg>
+        <pc:picChg chg="mod topLvl">
+          <ac:chgData name="城谷 匠" userId="afbae57c-d4ca-4e58-bc9a-6f765e208d89" providerId="ADAL" clId="{FD963559-32B2-43B7-8F97-A1E47AC731FA}" dt="2026-06-12T04:27:18.499" v="11" actId="165"/>
+          <ac:picMkLst>
+            <pc:docMk/>
+            <pc:sldMk cId="1156372304" sldId="256"/>
+            <ac:picMk id="7" creationId="{7DC96729-01FD-BCD1-73B7-1C1CC2007A08}"/>
+          </ac:picMkLst>
+        </pc:picChg>
+        <pc:picChg chg="mod topLvl">
+          <ac:chgData name="城谷 匠" userId="afbae57c-d4ca-4e58-bc9a-6f765e208d89" providerId="ADAL" clId="{FD963559-32B2-43B7-8F97-A1E47AC731FA}" dt="2026-06-12T04:27:18.499" v="11" actId="165"/>
+          <ac:picMkLst>
+            <pc:docMk/>
+            <pc:sldMk cId="1156372304" sldId="256"/>
+            <ac:picMk id="8" creationId="{E522FE0C-DF3D-F075-D0D5-84352E243FA7}"/>
+          </ac:picMkLst>
+        </pc:picChg>
+        <pc:cxnChg chg="add mod">
+          <ac:chgData name="城谷 匠" userId="afbae57c-d4ca-4e58-bc9a-6f765e208d89" providerId="ADAL" clId="{FD963559-32B2-43B7-8F97-A1E47AC731FA}" dt="2026-06-12T04:27:37.875" v="15" actId="208"/>
+          <ac:cxnSpMkLst>
+            <pc:docMk/>
+            <pc:sldMk cId="1156372304" sldId="256"/>
+            <ac:cxnSpMk id="27" creationId="{16338569-8FAB-7CA5-AE13-4256CAF8AB42}"/>
+          </ac:cxnSpMkLst>
+        </pc:cxnChg>
+      </pc:sldChg>
       <pc:sldChg chg="modSp mod">
         <pc:chgData name="城谷 匠" userId="afbae57c-d4ca-4e58-bc9a-6f765e208d89" providerId="ADAL" clId="{FD963559-32B2-43B7-8F97-A1E47AC731FA}" dt="2026-06-12T01:30:55.667" v="10" actId="27636"/>
         <pc:sldMkLst>
@@ -6426,907 +6521,931 @@
           </a:p>
         </p:txBody>
       </p:sp>
-      <p:grpSp>
-        <p:nvGrpSpPr>
-          <p:cNvPr id="4" name="グループ化 3">
-            <a:extLst>
-              <a:ext uri="{FF2B5EF4-FFF2-40B4-BE49-F238E27FC236}">
-                <a16:creationId xmlns:a16="http://schemas.microsoft.com/office/drawing/2014/main" id="{3CEA54AF-43E2-1E67-66B7-8BD31C730347}"/>
-              </a:ext>
-            </a:extLst>
-          </p:cNvPr>
-          <p:cNvGrpSpPr/>
+      <p:pic>
+        <p:nvPicPr>
+          <p:cNvPr id="5" name="グラフィックス 4">
+            <a:extLst>
+              <a:ext uri="{FF2B5EF4-FFF2-40B4-BE49-F238E27FC236}">
+                <a16:creationId xmlns:a16="http://schemas.microsoft.com/office/drawing/2014/main" id="{B3880868-382E-4AC9-32F7-F28691D35BEA}"/>
+              </a:ext>
+            </a:extLst>
+          </p:cNvPr>
+          <p:cNvPicPr>
+            <a:picLocks noChangeAspect="1"/>
+          </p:cNvPicPr>
           <p:nvPr/>
-        </p:nvGrpSpPr>
-        <p:grpSpPr>
-          <a:xfrm>
-            <a:off x="7149882" y="1690687"/>
-            <a:ext cx="10082647" cy="10624925"/>
-            <a:chOff x="3553020" y="2722504"/>
-            <a:chExt cx="10082647" cy="10624925"/>
-          </a:xfrm>
-        </p:grpSpPr>
-        <p:pic>
-          <p:nvPicPr>
-            <p:cNvPr id="5" name="グラフィックス 4">
-              <a:extLst>
-                <a:ext uri="{FF2B5EF4-FFF2-40B4-BE49-F238E27FC236}">
-                  <a16:creationId xmlns:a16="http://schemas.microsoft.com/office/drawing/2014/main" id="{B3880868-382E-4AC9-32F7-F28691D35BEA}"/>
-                </a:ext>
-              </a:extLst>
-            </p:cNvPr>
-            <p:cNvPicPr>
-              <a:picLocks noChangeAspect="1"/>
-            </p:cNvPicPr>
-            <p:nvPr/>
-          </p:nvPicPr>
-          <p:blipFill>
-            <a:blip>
-              <a:extLst>
-                <a:ext uri="{96DAC541-7B7A-43D3-8B79-37D633B846F1}">
-                  <asvg:svgBlip xmlns:asvg="http://schemas.microsoft.com/office/drawing/2016/SVG/main" r:embed="rId2"/>
-                </a:ext>
-              </a:extLst>
-            </a:blip>
-            <a:stretch>
-              <a:fillRect/>
-            </a:stretch>
-          </p:blipFill>
-          <p:spPr>
-            <a:xfrm>
-              <a:off x="7873019" y="8414900"/>
-              <a:ext cx="1440000" cy="1440000"/>
-            </a:xfrm>
-            <a:prstGeom prst="rect">
-              <a:avLst/>
-            </a:prstGeom>
-          </p:spPr>
-        </p:pic>
-        <p:pic>
-          <p:nvPicPr>
-            <p:cNvPr id="6" name="グラフィックス 5">
-              <a:extLst>
-                <a:ext uri="{FF2B5EF4-FFF2-40B4-BE49-F238E27FC236}">
-                  <a16:creationId xmlns:a16="http://schemas.microsoft.com/office/drawing/2014/main" id="{97A09EAD-F0F0-5E7F-5DF7-7BA0A63C6513}"/>
-                </a:ext>
-              </a:extLst>
-            </p:cNvPr>
-            <p:cNvPicPr>
-              <a:picLocks noChangeAspect="1"/>
-            </p:cNvPicPr>
-            <p:nvPr/>
-          </p:nvPicPr>
-          <p:blipFill>
-            <a:blip>
-              <a:extLst>
-                <a:ext uri="{96DAC541-7B7A-43D3-8B79-37D633B846F1}">
-                  <asvg:svgBlip xmlns:asvg="http://schemas.microsoft.com/office/drawing/2016/SVG/main" r:embed="rId3"/>
-                </a:ext>
-              </a:extLst>
-            </a:blip>
-            <a:stretch>
-              <a:fillRect/>
-            </a:stretch>
-          </p:blipFill>
-          <p:spPr>
-            <a:xfrm>
-              <a:off x="10751206" y="8414900"/>
-              <a:ext cx="1440000" cy="1440000"/>
-            </a:xfrm>
-            <a:prstGeom prst="rect">
-              <a:avLst/>
-            </a:prstGeom>
-          </p:spPr>
-        </p:pic>
-        <p:pic>
-          <p:nvPicPr>
-            <p:cNvPr id="7" name="グラフィックス 6">
-              <a:extLst>
-                <a:ext uri="{FF2B5EF4-FFF2-40B4-BE49-F238E27FC236}">
-                  <a16:creationId xmlns:a16="http://schemas.microsoft.com/office/drawing/2014/main" id="{7DC96729-01FD-BCD1-73B7-1C1CC2007A08}"/>
-                </a:ext>
-              </a:extLst>
-            </p:cNvPr>
-            <p:cNvPicPr>
-              <a:picLocks noChangeAspect="1"/>
-            </p:cNvPicPr>
-            <p:nvPr/>
-          </p:nvPicPr>
-          <p:blipFill>
-            <a:blip>
-              <a:extLst>
-                <a:ext uri="{96DAC541-7B7A-43D3-8B79-37D633B846F1}">
-                  <asvg:svgBlip xmlns:asvg="http://schemas.microsoft.com/office/drawing/2016/SVG/main" r:embed="rId4"/>
-                </a:ext>
-              </a:extLst>
-            </a:blip>
-            <a:stretch>
-              <a:fillRect/>
-            </a:stretch>
-          </p:blipFill>
-          <p:spPr>
-            <a:xfrm>
-              <a:off x="10751206" y="11261098"/>
-              <a:ext cx="1440000" cy="1440000"/>
-            </a:xfrm>
-            <a:prstGeom prst="rect">
-              <a:avLst/>
-            </a:prstGeom>
-          </p:spPr>
-        </p:pic>
-        <p:pic>
-          <p:nvPicPr>
-            <p:cNvPr id="8" name="グラフィックス 7">
-              <a:extLst>
-                <a:ext uri="{FF2B5EF4-FFF2-40B4-BE49-F238E27FC236}">
-                  <a16:creationId xmlns:a16="http://schemas.microsoft.com/office/drawing/2014/main" id="{E522FE0C-DF3D-F075-D0D5-84352E243FA7}"/>
-                </a:ext>
-              </a:extLst>
-            </p:cNvPr>
-            <p:cNvPicPr>
-              <a:picLocks noChangeAspect="1"/>
-            </p:cNvPicPr>
-            <p:nvPr/>
-          </p:nvPicPr>
-          <p:blipFill>
-            <a:blip>
-              <a:extLst>
-                <a:ext uri="{96DAC541-7B7A-43D3-8B79-37D633B846F1}">
-                  <asvg:svgBlip xmlns:asvg="http://schemas.microsoft.com/office/drawing/2016/SVG/main" r:embed="rId5"/>
-                </a:ext>
-              </a:extLst>
-            </a:blip>
-            <a:stretch>
-              <a:fillRect/>
-            </a:stretch>
-          </p:blipFill>
-          <p:spPr>
-            <a:xfrm>
-              <a:off x="7873019" y="2722504"/>
-              <a:ext cx="1440000" cy="1440000"/>
-            </a:xfrm>
-            <a:prstGeom prst="rect">
-              <a:avLst/>
-            </a:prstGeom>
-          </p:spPr>
-        </p:pic>
-        <p:pic>
-          <p:nvPicPr>
-            <p:cNvPr id="9" name="グラフィックス 8">
-              <a:extLst>
-                <a:ext uri="{FF2B5EF4-FFF2-40B4-BE49-F238E27FC236}">
-                  <a16:creationId xmlns:a16="http://schemas.microsoft.com/office/drawing/2014/main" id="{A940BD57-6C7C-5A30-87EB-EE85A1DBB8C0}"/>
-                </a:ext>
-              </a:extLst>
-            </p:cNvPr>
-            <p:cNvPicPr>
-              <a:picLocks noChangeAspect="1"/>
-            </p:cNvPicPr>
-            <p:nvPr/>
-          </p:nvPicPr>
-          <p:blipFill>
-            <a:blip>
-              <a:extLst>
-                <a:ext uri="{96DAC541-7B7A-43D3-8B79-37D633B846F1}">
-                  <asvg:svgBlip xmlns:asvg="http://schemas.microsoft.com/office/drawing/2016/SVG/main" r:embed="rId6"/>
-                </a:ext>
-              </a:extLst>
-            </a:blip>
-            <a:stretch>
-              <a:fillRect/>
-            </a:stretch>
-          </p:blipFill>
-          <p:spPr>
-            <a:xfrm>
-              <a:off x="3553020" y="5208702"/>
-              <a:ext cx="2160000" cy="2160000"/>
-            </a:xfrm>
-            <a:prstGeom prst="rect">
-              <a:avLst/>
-            </a:prstGeom>
-          </p:spPr>
-        </p:pic>
-        <p:cxnSp>
-          <p:nvCxnSpPr>
-            <p:cNvPr id="10" name="コネクタ: カギ線 9">
-              <a:extLst>
-                <a:ext uri="{FF2B5EF4-FFF2-40B4-BE49-F238E27FC236}">
-                  <a16:creationId xmlns:a16="http://schemas.microsoft.com/office/drawing/2014/main" id="{51A3008E-6A9F-5086-F63A-863795834288}"/>
-                </a:ext>
-              </a:extLst>
-            </p:cNvPr>
-            <p:cNvCxnSpPr>
-              <a:cxnSpLocks/>
-              <a:stCxn id="7" idx="1"/>
-              <a:endCxn id="5" idx="3"/>
-            </p:cNvCxnSpPr>
-            <p:nvPr/>
-          </p:nvCxnSpPr>
-          <p:spPr>
-            <a:xfrm rot="10800000">
-              <a:off x="9313020" y="9134900"/>
-              <a:ext cx="1438187" cy="2846198"/>
-            </a:xfrm>
-            <a:prstGeom prst="bentConnector3">
-              <a:avLst/>
-            </a:prstGeom>
-            <a:ln w="76200">
-              <a:solidFill>
-                <a:schemeClr val="bg2"/>
-              </a:solidFill>
-              <a:tailEnd type="triangle"/>
-            </a:ln>
-          </p:spPr>
-          <p:style>
-            <a:lnRef idx="1">
-              <a:schemeClr val="accent1"/>
-            </a:lnRef>
-            <a:fillRef idx="0">
-              <a:schemeClr val="accent1"/>
-            </a:fillRef>
-            <a:effectRef idx="0">
-              <a:schemeClr val="accent1"/>
-            </a:effectRef>
-            <a:fontRef idx="minor">
-              <a:schemeClr val="tx1"/>
-            </a:fontRef>
-          </p:style>
-        </p:cxnSp>
-        <p:pic>
-          <p:nvPicPr>
-            <p:cNvPr id="11" name="グラフィックス 10">
-              <a:extLst>
-                <a:ext uri="{FF2B5EF4-FFF2-40B4-BE49-F238E27FC236}">
-                  <a16:creationId xmlns:a16="http://schemas.microsoft.com/office/drawing/2014/main" id="{1C49E6CD-EF0B-AC43-5FA8-4EDA20221E18}"/>
-                </a:ext>
-              </a:extLst>
-            </p:cNvPr>
-            <p:cNvPicPr>
-              <a:picLocks noChangeAspect="1"/>
-            </p:cNvPicPr>
-            <p:nvPr/>
-          </p:nvPicPr>
-          <p:blipFill>
-            <a:blip>
-              <a:extLst>
-                <a:ext uri="{96DAC541-7B7A-43D3-8B79-37D633B846F1}">
-                  <asvg:svgBlip xmlns:asvg="http://schemas.microsoft.com/office/drawing/2016/SVG/main" r:embed="rId7"/>
-                </a:ext>
-              </a:extLst>
-            </a:blip>
-            <a:stretch>
-              <a:fillRect/>
-            </a:stretch>
-          </p:blipFill>
-          <p:spPr>
-            <a:xfrm>
-              <a:off x="7873019" y="11261098"/>
-              <a:ext cx="1440000" cy="1440000"/>
-            </a:xfrm>
-            <a:prstGeom prst="rect">
-              <a:avLst/>
-            </a:prstGeom>
-          </p:spPr>
-        </p:pic>
-        <p:pic>
-          <p:nvPicPr>
-            <p:cNvPr id="12" name="グラフィックス 11">
-              <a:extLst>
-                <a:ext uri="{FF2B5EF4-FFF2-40B4-BE49-F238E27FC236}">
-                  <a16:creationId xmlns:a16="http://schemas.microsoft.com/office/drawing/2014/main" id="{74D7D497-DB02-09C1-824E-33957D2BCD84}"/>
-                </a:ext>
-              </a:extLst>
-            </p:cNvPr>
-            <p:cNvPicPr>
-              <a:picLocks noChangeAspect="1"/>
-            </p:cNvPicPr>
-            <p:nvPr/>
-          </p:nvPicPr>
-          <p:blipFill>
-            <a:blip>
-              <a:extLst>
-                <a:ext uri="{96DAC541-7B7A-43D3-8B79-37D633B846F1}">
-                  <asvg:svgBlip xmlns:asvg="http://schemas.microsoft.com/office/drawing/2016/SVG/main" r:embed="rId8"/>
-                </a:ext>
-              </a:extLst>
-            </a:blip>
-            <a:stretch>
-              <a:fillRect/>
-            </a:stretch>
-          </p:blipFill>
-          <p:spPr>
-            <a:xfrm>
-              <a:off x="7873019" y="5568702"/>
-              <a:ext cx="1440000" cy="1440000"/>
-            </a:xfrm>
-            <a:prstGeom prst="rect">
-              <a:avLst/>
-            </a:prstGeom>
-          </p:spPr>
-        </p:pic>
-        <p:cxnSp>
-          <p:nvCxnSpPr>
-            <p:cNvPr id="13" name="コネクタ: カギ線 12">
-              <a:extLst>
-                <a:ext uri="{FF2B5EF4-FFF2-40B4-BE49-F238E27FC236}">
-                  <a16:creationId xmlns:a16="http://schemas.microsoft.com/office/drawing/2014/main" id="{6CBCA35B-ABCD-BD02-C107-38A51324CDBD}"/>
-                </a:ext>
-              </a:extLst>
-            </p:cNvPr>
-            <p:cNvCxnSpPr>
-              <a:cxnSpLocks/>
-              <a:stCxn id="5" idx="1"/>
-              <a:endCxn id="9" idx="3"/>
-            </p:cNvCxnSpPr>
-            <p:nvPr/>
-          </p:nvCxnSpPr>
-          <p:spPr>
-            <a:xfrm rot="10800000">
-              <a:off x="5713021" y="6288702"/>
-              <a:ext cx="2159999" cy="2846198"/>
-            </a:xfrm>
-            <a:prstGeom prst="bentConnector3">
-              <a:avLst/>
-            </a:prstGeom>
-            <a:ln w="76200">
-              <a:solidFill>
-                <a:schemeClr val="bg2"/>
-              </a:solidFill>
-              <a:headEnd type="triangle" w="med" len="med"/>
-              <a:tailEnd type="triangle" w="med" len="med"/>
-            </a:ln>
-          </p:spPr>
-          <p:style>
-            <a:lnRef idx="1">
-              <a:schemeClr val="accent1"/>
-            </a:lnRef>
-            <a:fillRef idx="0">
-              <a:schemeClr val="accent1"/>
-            </a:fillRef>
-            <a:effectRef idx="0">
-              <a:schemeClr val="accent1"/>
-            </a:effectRef>
-            <a:fontRef idx="minor">
-              <a:schemeClr val="tx1"/>
-            </a:fontRef>
-          </p:style>
-        </p:cxnSp>
-        <p:cxnSp>
-          <p:nvCxnSpPr>
-            <p:cNvPr id="14" name="直線矢印コネクタ 13">
-              <a:extLst>
-                <a:ext uri="{FF2B5EF4-FFF2-40B4-BE49-F238E27FC236}">
-                  <a16:creationId xmlns:a16="http://schemas.microsoft.com/office/drawing/2014/main" id="{5665F72F-0E9C-93A9-29FB-1BC3EF398E73}"/>
-                </a:ext>
-              </a:extLst>
-            </p:cNvPr>
-            <p:cNvCxnSpPr>
-              <a:cxnSpLocks/>
-              <a:stCxn id="6" idx="1"/>
-              <a:endCxn id="5" idx="3"/>
-            </p:cNvCxnSpPr>
-            <p:nvPr/>
-          </p:nvCxnSpPr>
-          <p:spPr>
-            <a:xfrm flipH="1">
-              <a:off x="9313019" y="9134900"/>
-              <a:ext cx="1438187" cy="0"/>
-            </a:xfrm>
-            <a:prstGeom prst="straightConnector1">
-              <a:avLst/>
-            </a:prstGeom>
-            <a:ln w="76200">
-              <a:solidFill>
-                <a:schemeClr val="bg2"/>
-              </a:solidFill>
-              <a:headEnd type="triangle" w="med" len="med"/>
-              <a:tailEnd type="triangle" w="med" len="med"/>
-            </a:ln>
-          </p:spPr>
-          <p:style>
-            <a:lnRef idx="1">
-              <a:schemeClr val="accent1"/>
-            </a:lnRef>
-            <a:fillRef idx="0">
-              <a:schemeClr val="accent1"/>
-            </a:fillRef>
-            <a:effectRef idx="0">
-              <a:schemeClr val="accent1"/>
-            </a:effectRef>
-            <a:fontRef idx="minor">
-              <a:schemeClr val="tx1"/>
-            </a:fontRef>
-          </p:style>
-        </p:cxnSp>
-        <p:cxnSp>
-          <p:nvCxnSpPr>
-            <p:cNvPr id="15" name="コネクタ: カギ線 14">
-              <a:extLst>
-                <a:ext uri="{FF2B5EF4-FFF2-40B4-BE49-F238E27FC236}">
-                  <a16:creationId xmlns:a16="http://schemas.microsoft.com/office/drawing/2014/main" id="{C5B81EFA-4947-66CF-F891-8299F25410FA}"/>
-                </a:ext>
-              </a:extLst>
-            </p:cNvPr>
-            <p:cNvCxnSpPr>
-              <a:cxnSpLocks/>
-              <a:stCxn id="8" idx="1"/>
-              <a:endCxn id="9" idx="3"/>
-            </p:cNvCxnSpPr>
-            <p:nvPr/>
-          </p:nvCxnSpPr>
-          <p:spPr>
-            <a:xfrm rot="10800000" flipV="1">
-              <a:off x="5713021" y="3442504"/>
-              <a:ext cx="2159999" cy="2846198"/>
-            </a:xfrm>
-            <a:prstGeom prst="bentConnector3">
-              <a:avLst>
-                <a:gd name="adj1" fmla="val 50000"/>
-              </a:avLst>
-            </a:prstGeom>
-            <a:ln w="76200">
-              <a:solidFill>
-                <a:schemeClr val="bg2"/>
-              </a:solidFill>
-              <a:headEnd type="triangle" w="med" len="med"/>
-              <a:tailEnd type="triangle" w="med" len="med"/>
-            </a:ln>
-          </p:spPr>
-          <p:style>
-            <a:lnRef idx="1">
-              <a:schemeClr val="accent1"/>
-            </a:lnRef>
-            <a:fillRef idx="0">
-              <a:schemeClr val="accent1"/>
-            </a:fillRef>
-            <a:effectRef idx="0">
-              <a:schemeClr val="accent1"/>
-            </a:effectRef>
-            <a:fontRef idx="minor">
-              <a:schemeClr val="tx1"/>
-            </a:fontRef>
-          </p:style>
-        </p:cxnSp>
-        <p:cxnSp>
-          <p:nvCxnSpPr>
-            <p:cNvPr id="16" name="直線矢印コネクタ 15">
-              <a:extLst>
-                <a:ext uri="{FF2B5EF4-FFF2-40B4-BE49-F238E27FC236}">
-                  <a16:creationId xmlns:a16="http://schemas.microsoft.com/office/drawing/2014/main" id="{9A7801F3-E0BF-F538-5DE4-F6D6A9CBE102}"/>
-                </a:ext>
-              </a:extLst>
-            </p:cNvPr>
-            <p:cNvCxnSpPr>
-              <a:cxnSpLocks/>
-              <a:stCxn id="12" idx="1"/>
-              <a:endCxn id="9" idx="3"/>
-            </p:cNvCxnSpPr>
-            <p:nvPr/>
-          </p:nvCxnSpPr>
-          <p:spPr>
-            <a:xfrm flipH="1">
-              <a:off x="5713020" y="6288702"/>
-              <a:ext cx="2159999" cy="0"/>
-            </a:xfrm>
-            <a:prstGeom prst="straightConnector1">
-              <a:avLst/>
-            </a:prstGeom>
-            <a:ln w="76200">
-              <a:solidFill>
-                <a:schemeClr val="bg2"/>
-              </a:solidFill>
-              <a:headEnd type="triangle" w="med" len="med"/>
-              <a:tailEnd type="triangle" w="med" len="med"/>
-            </a:ln>
-          </p:spPr>
-          <p:style>
-            <a:lnRef idx="1">
-              <a:schemeClr val="accent1"/>
-            </a:lnRef>
-            <a:fillRef idx="0">
-              <a:schemeClr val="accent1"/>
-            </a:fillRef>
-            <a:effectRef idx="0">
-              <a:schemeClr val="accent1"/>
-            </a:effectRef>
-            <a:fontRef idx="minor">
-              <a:schemeClr val="tx1"/>
-            </a:fontRef>
-          </p:style>
-        </p:cxnSp>
-        <p:sp>
-          <p:nvSpPr>
-            <p:cNvPr id="17" name="テキスト ボックス 16">
-              <a:extLst>
-                <a:ext uri="{FF2B5EF4-FFF2-40B4-BE49-F238E27FC236}">
-                  <a16:creationId xmlns:a16="http://schemas.microsoft.com/office/drawing/2014/main" id="{2E87E127-501D-495F-6FC0-34B4F7E95A68}"/>
-                </a:ext>
-              </a:extLst>
-            </p:cNvPr>
-            <p:cNvSpPr txBox="1"/>
-            <p:nvPr/>
-          </p:nvSpPr>
-          <p:spPr>
-            <a:xfrm>
-              <a:off x="7513019" y="4130593"/>
-              <a:ext cx="2160000" cy="646331"/>
-            </a:xfrm>
-            <a:prstGeom prst="rect">
-              <a:avLst/>
-            </a:prstGeom>
-            <a:noFill/>
-          </p:spPr>
-          <p:txBody>
-            <a:bodyPr wrap="square" rtlCol="0">
-              <a:spAutoFit/>
-            </a:bodyPr>
-            <a:lstStyle/>
-            <a:p>
-              <a:pPr algn="ctr"/>
-              <a:r>
-                <a:rPr kumimoji="1" lang="ja-JP" altLang="en-US" dirty="0"/>
-                <a:t>さくらの</a:t>
-              </a:r>
-              <a:br>
-                <a:rPr kumimoji="1" lang="en-US" altLang="ja-JP" dirty="0"/>
-              </a:br>
-              <a:r>
-                <a:rPr kumimoji="1" lang="ja-JP" altLang="en-US" dirty="0"/>
-                <a:t>レンタルサーバ</a:t>
-              </a:r>
-            </a:p>
-          </p:txBody>
-        </p:sp>
-        <p:sp>
-          <p:nvSpPr>
-            <p:cNvPr id="18" name="テキスト ボックス 17">
-              <a:extLst>
-                <a:ext uri="{FF2B5EF4-FFF2-40B4-BE49-F238E27FC236}">
-                  <a16:creationId xmlns:a16="http://schemas.microsoft.com/office/drawing/2014/main" id="{08AD9044-79AA-2BF3-A59C-139D0BB2000A}"/>
-                </a:ext>
-              </a:extLst>
-            </p:cNvPr>
-            <p:cNvSpPr txBox="1"/>
-            <p:nvPr/>
-          </p:nvSpPr>
-          <p:spPr>
-            <a:xfrm>
-              <a:off x="8593019" y="7028636"/>
-              <a:ext cx="2160000" cy="646331"/>
-            </a:xfrm>
-            <a:prstGeom prst="rect">
-              <a:avLst/>
-            </a:prstGeom>
-            <a:noFill/>
-          </p:spPr>
-          <p:txBody>
-            <a:bodyPr wrap="square" rtlCol="0">
-              <a:spAutoFit/>
-            </a:bodyPr>
-            <a:lstStyle/>
-            <a:p>
-              <a:pPr algn="ctr"/>
-              <a:r>
-                <a:rPr kumimoji="1" lang="ja-JP" altLang="en-US" dirty="0"/>
-                <a:t>オブジェクト</a:t>
-              </a:r>
-              <a:br>
-                <a:rPr kumimoji="1" lang="en-US" altLang="ja-JP" dirty="0"/>
-              </a:br>
-              <a:r>
-                <a:rPr kumimoji="1" lang="ja-JP" altLang="en-US" dirty="0"/>
-                <a:t>ストレージ</a:t>
-              </a:r>
-            </a:p>
-          </p:txBody>
-        </p:sp>
-        <p:cxnSp>
-          <p:nvCxnSpPr>
-            <p:cNvPr id="19" name="直線矢印コネクタ 18">
-              <a:extLst>
-                <a:ext uri="{FF2B5EF4-FFF2-40B4-BE49-F238E27FC236}">
-                  <a16:creationId xmlns:a16="http://schemas.microsoft.com/office/drawing/2014/main" id="{BEA994B3-D82B-D8D6-55F0-9174BB4C50E6}"/>
-                </a:ext>
-              </a:extLst>
-            </p:cNvPr>
-            <p:cNvCxnSpPr>
-              <a:cxnSpLocks/>
-              <a:stCxn id="5" idx="0"/>
-              <a:endCxn id="12" idx="2"/>
-            </p:cNvCxnSpPr>
-            <p:nvPr/>
-          </p:nvCxnSpPr>
-          <p:spPr>
-            <a:xfrm flipV="1">
-              <a:off x="8593019" y="7008702"/>
-              <a:ext cx="0" cy="1406198"/>
-            </a:xfrm>
-            <a:prstGeom prst="straightConnector1">
-              <a:avLst/>
-            </a:prstGeom>
-            <a:ln w="76200">
-              <a:solidFill>
-                <a:schemeClr val="bg2"/>
-              </a:solidFill>
-              <a:headEnd type="triangle" w="med" len="med"/>
-              <a:tailEnd type="triangle" w="med" len="med"/>
-            </a:ln>
-          </p:spPr>
-          <p:style>
-            <a:lnRef idx="1">
-              <a:schemeClr val="accent1"/>
-            </a:lnRef>
-            <a:fillRef idx="0">
-              <a:schemeClr val="accent1"/>
-            </a:fillRef>
-            <a:effectRef idx="0">
-              <a:schemeClr val="accent1"/>
-            </a:effectRef>
-            <a:fontRef idx="minor">
-              <a:schemeClr val="tx1"/>
-            </a:fontRef>
-          </p:style>
-        </p:cxnSp>
-        <p:sp>
-          <p:nvSpPr>
-            <p:cNvPr id="20" name="テキスト ボックス 19">
-              <a:extLst>
-                <a:ext uri="{FF2B5EF4-FFF2-40B4-BE49-F238E27FC236}">
-                  <a16:creationId xmlns:a16="http://schemas.microsoft.com/office/drawing/2014/main" id="{F04A8B08-D24B-99DB-FEEB-E5098440177B}"/>
-                </a:ext>
-              </a:extLst>
-            </p:cNvPr>
-            <p:cNvSpPr txBox="1"/>
-            <p:nvPr/>
-          </p:nvSpPr>
-          <p:spPr>
-            <a:xfrm>
-              <a:off x="6426746" y="9845569"/>
-              <a:ext cx="2160000" cy="369332"/>
-            </a:xfrm>
-            <a:prstGeom prst="rect">
-              <a:avLst/>
-            </a:prstGeom>
-            <a:noFill/>
-          </p:spPr>
-          <p:txBody>
-            <a:bodyPr wrap="square" rtlCol="0">
-              <a:spAutoFit/>
-            </a:bodyPr>
-            <a:lstStyle/>
-            <a:p>
-              <a:pPr algn="ctr"/>
-              <a:r>
-                <a:rPr kumimoji="1" lang="en-US" altLang="ja-JP" dirty="0" err="1"/>
-                <a:t>AppRun</a:t>
-              </a:r>
-              <a:r>
-                <a:rPr kumimoji="1" lang="ja-JP" altLang="en-US" dirty="0"/>
-                <a:t>共用型</a:t>
-              </a:r>
-            </a:p>
-          </p:txBody>
-        </p:sp>
-        <p:sp>
-          <p:nvSpPr>
-            <p:cNvPr id="21" name="テキスト ボックス 20">
-              <a:extLst>
-                <a:ext uri="{FF2B5EF4-FFF2-40B4-BE49-F238E27FC236}">
-                  <a16:creationId xmlns:a16="http://schemas.microsoft.com/office/drawing/2014/main" id="{4BDE2633-1D8E-EEA2-C61D-06E780C19E46}"/>
-                </a:ext>
-              </a:extLst>
-            </p:cNvPr>
-            <p:cNvSpPr txBox="1"/>
-            <p:nvPr/>
-          </p:nvSpPr>
-          <p:spPr>
-            <a:xfrm>
-              <a:off x="7513019" y="12701098"/>
-              <a:ext cx="2160000" cy="646331"/>
-            </a:xfrm>
-            <a:prstGeom prst="rect">
-              <a:avLst/>
-            </a:prstGeom>
-            <a:noFill/>
-          </p:spPr>
-          <p:txBody>
-            <a:bodyPr wrap="square" rtlCol="0">
-              <a:spAutoFit/>
-            </a:bodyPr>
-            <a:lstStyle/>
-            <a:p>
-              <a:pPr algn="ctr"/>
-              <a:r>
-                <a:rPr kumimoji="1" lang="ja-JP" altLang="en-US" dirty="0"/>
-                <a:t>モニタリング</a:t>
-              </a:r>
-              <a:br>
-                <a:rPr kumimoji="1" lang="en-US" altLang="ja-JP" dirty="0"/>
-              </a:br>
-              <a:r>
-                <a:rPr kumimoji="1" lang="ja-JP" altLang="en-US" dirty="0"/>
-                <a:t>スイート</a:t>
-              </a:r>
-            </a:p>
-          </p:txBody>
-        </p:sp>
-        <p:sp>
-          <p:nvSpPr>
-            <p:cNvPr id="22" name="テキスト ボックス 21">
-              <a:extLst>
-                <a:ext uri="{FF2B5EF4-FFF2-40B4-BE49-F238E27FC236}">
-                  <a16:creationId xmlns:a16="http://schemas.microsoft.com/office/drawing/2014/main" id="{5122F321-7C0D-8ED7-4C52-DBDFCA3C5BC0}"/>
-                </a:ext>
-              </a:extLst>
-            </p:cNvPr>
-            <p:cNvSpPr txBox="1"/>
-            <p:nvPr/>
-          </p:nvSpPr>
-          <p:spPr>
-            <a:xfrm>
-              <a:off x="10391206" y="12701098"/>
-              <a:ext cx="2160000" cy="646331"/>
-            </a:xfrm>
-            <a:prstGeom prst="rect">
-              <a:avLst/>
-            </a:prstGeom>
-            <a:noFill/>
-          </p:spPr>
-          <p:txBody>
-            <a:bodyPr wrap="square" rtlCol="0">
-              <a:spAutoFit/>
-            </a:bodyPr>
-            <a:lstStyle/>
-            <a:p>
-              <a:pPr algn="ctr"/>
-              <a:r>
-                <a:rPr kumimoji="1" lang="ja-JP" altLang="en-US" dirty="0"/>
-                <a:t>コンテナ</a:t>
-              </a:r>
-              <a:br>
-                <a:rPr kumimoji="1" lang="en-US" altLang="ja-JP" dirty="0"/>
-              </a:br>
-              <a:r>
-                <a:rPr kumimoji="1" lang="ja-JP" altLang="en-US" dirty="0"/>
-                <a:t>レジストリ</a:t>
-              </a:r>
-            </a:p>
-          </p:txBody>
-        </p:sp>
-        <p:sp>
-          <p:nvSpPr>
-            <p:cNvPr id="23" name="テキスト ボックス 22">
-              <a:extLst>
-                <a:ext uri="{FF2B5EF4-FFF2-40B4-BE49-F238E27FC236}">
-                  <a16:creationId xmlns:a16="http://schemas.microsoft.com/office/drawing/2014/main" id="{E0FAB9D4-8F6A-64C2-8D67-9132DA54ED87}"/>
-                </a:ext>
-              </a:extLst>
-            </p:cNvPr>
-            <p:cNvSpPr txBox="1"/>
-            <p:nvPr/>
-          </p:nvSpPr>
-          <p:spPr>
-            <a:xfrm>
-              <a:off x="11475667" y="9849293"/>
-              <a:ext cx="2160000" cy="369332"/>
-            </a:xfrm>
-            <a:prstGeom prst="rect">
-              <a:avLst/>
-            </a:prstGeom>
-            <a:noFill/>
-          </p:spPr>
-          <p:txBody>
-            <a:bodyPr wrap="square" rtlCol="0">
-              <a:spAutoFit/>
-            </a:bodyPr>
-            <a:lstStyle/>
-            <a:p>
-              <a:pPr algn="ctr"/>
-              <a:r>
-                <a:rPr kumimoji="1" lang="ja-JP" altLang="en-US" dirty="0"/>
-                <a:t>高火力 </a:t>
-              </a:r>
-              <a:r>
-                <a:rPr kumimoji="1" lang="en-US" altLang="ja-JP" dirty="0"/>
-                <a:t>DOK</a:t>
-              </a:r>
-              <a:endParaRPr kumimoji="1" lang="ja-JP" altLang="en-US" dirty="0"/>
-            </a:p>
-          </p:txBody>
-        </p:sp>
-        <p:cxnSp>
-          <p:nvCxnSpPr>
-            <p:cNvPr id="24" name="直線矢印コネクタ 23">
-              <a:extLst>
-                <a:ext uri="{FF2B5EF4-FFF2-40B4-BE49-F238E27FC236}">
-                  <a16:creationId xmlns:a16="http://schemas.microsoft.com/office/drawing/2014/main" id="{BEF72F5E-CE1A-9E0E-3601-3311B5F1A2B8}"/>
-                </a:ext>
-              </a:extLst>
-            </p:cNvPr>
-            <p:cNvCxnSpPr>
-              <a:cxnSpLocks/>
-              <a:stCxn id="7" idx="0"/>
-              <a:endCxn id="6" idx="2"/>
-            </p:cNvCxnSpPr>
-            <p:nvPr/>
-          </p:nvCxnSpPr>
-          <p:spPr>
-            <a:xfrm flipV="1">
-              <a:off x="11471206" y="9854900"/>
-              <a:ext cx="0" cy="1406198"/>
-            </a:xfrm>
-            <a:prstGeom prst="straightConnector1">
-              <a:avLst/>
-            </a:prstGeom>
-            <a:ln w="76200">
-              <a:solidFill>
-                <a:schemeClr val="bg2"/>
-              </a:solidFill>
-              <a:tailEnd type="triangle"/>
-            </a:ln>
-          </p:spPr>
-          <p:style>
-            <a:lnRef idx="1">
-              <a:schemeClr val="accent1"/>
-            </a:lnRef>
-            <a:fillRef idx="0">
-              <a:schemeClr val="accent1"/>
-            </a:fillRef>
-            <a:effectRef idx="0">
-              <a:schemeClr val="accent1"/>
-            </a:effectRef>
-            <a:fontRef idx="minor">
-              <a:schemeClr val="tx1"/>
-            </a:fontRef>
-          </p:style>
-        </p:cxnSp>
-        <p:cxnSp>
-          <p:nvCxnSpPr>
-            <p:cNvPr id="25" name="直線矢印コネクタ 24">
-              <a:extLst>
-                <a:ext uri="{FF2B5EF4-FFF2-40B4-BE49-F238E27FC236}">
-                  <a16:creationId xmlns:a16="http://schemas.microsoft.com/office/drawing/2014/main" id="{EB44ECEB-367D-086D-8E15-97D80659D6AB}"/>
-                </a:ext>
-              </a:extLst>
-            </p:cNvPr>
-            <p:cNvCxnSpPr>
-              <a:cxnSpLocks/>
-              <a:stCxn id="5" idx="2"/>
-              <a:endCxn id="11" idx="0"/>
-            </p:cNvCxnSpPr>
-            <p:nvPr/>
-          </p:nvCxnSpPr>
-          <p:spPr>
-            <a:xfrm>
-              <a:off x="8593019" y="9854900"/>
-              <a:ext cx="0" cy="1406198"/>
-            </a:xfrm>
-            <a:prstGeom prst="straightConnector1">
-              <a:avLst/>
-            </a:prstGeom>
-            <a:ln w="76200">
-              <a:solidFill>
-                <a:schemeClr val="bg2"/>
-              </a:solidFill>
-              <a:tailEnd type="triangle"/>
-            </a:ln>
-          </p:spPr>
-          <p:style>
-            <a:lnRef idx="1">
-              <a:schemeClr val="accent1"/>
-            </a:lnRef>
-            <a:fillRef idx="0">
-              <a:schemeClr val="accent1"/>
-            </a:fillRef>
-            <a:effectRef idx="0">
-              <a:schemeClr val="accent1"/>
-            </a:effectRef>
-            <a:fontRef idx="minor">
-              <a:schemeClr val="tx1"/>
-            </a:fontRef>
-          </p:style>
-        </p:cxnSp>
-      </p:grpSp>
+        </p:nvPicPr>
+        <p:blipFill>
+          <a:blip>
+            <a:extLst>
+              <a:ext uri="{96DAC541-7B7A-43D3-8B79-37D633B846F1}">
+                <asvg:svgBlip xmlns:asvg="http://schemas.microsoft.com/office/drawing/2016/SVG/main" r:embed="rId2"/>
+              </a:ext>
+            </a:extLst>
+          </a:blip>
+          <a:stretch>
+            <a:fillRect/>
+          </a:stretch>
+        </p:blipFill>
+        <p:spPr>
+          <a:xfrm>
+            <a:off x="11469881" y="7383083"/>
+            <a:ext cx="1440000" cy="1440000"/>
+          </a:xfrm>
+          <a:prstGeom prst="rect">
+            <a:avLst/>
+          </a:prstGeom>
+        </p:spPr>
+      </p:pic>
+      <p:pic>
+        <p:nvPicPr>
+          <p:cNvPr id="6" name="グラフィックス 5">
+            <a:extLst>
+              <a:ext uri="{FF2B5EF4-FFF2-40B4-BE49-F238E27FC236}">
+                <a16:creationId xmlns:a16="http://schemas.microsoft.com/office/drawing/2014/main" id="{97A09EAD-F0F0-5E7F-5DF7-7BA0A63C6513}"/>
+              </a:ext>
+            </a:extLst>
+          </p:cNvPr>
+          <p:cNvPicPr>
+            <a:picLocks noChangeAspect="1"/>
+          </p:cNvPicPr>
+          <p:nvPr/>
+        </p:nvPicPr>
+        <p:blipFill>
+          <a:blip>
+            <a:extLst>
+              <a:ext uri="{96DAC541-7B7A-43D3-8B79-37D633B846F1}">
+                <asvg:svgBlip xmlns:asvg="http://schemas.microsoft.com/office/drawing/2016/SVG/main" r:embed="rId3"/>
+              </a:ext>
+            </a:extLst>
+          </a:blip>
+          <a:stretch>
+            <a:fillRect/>
+          </a:stretch>
+        </p:blipFill>
+        <p:spPr>
+          <a:xfrm>
+            <a:off x="14348068" y="7383083"/>
+            <a:ext cx="1440000" cy="1440000"/>
+          </a:xfrm>
+          <a:prstGeom prst="rect">
+            <a:avLst/>
+          </a:prstGeom>
+        </p:spPr>
+      </p:pic>
+      <p:pic>
+        <p:nvPicPr>
+          <p:cNvPr id="7" name="グラフィックス 6">
+            <a:extLst>
+              <a:ext uri="{FF2B5EF4-FFF2-40B4-BE49-F238E27FC236}">
+                <a16:creationId xmlns:a16="http://schemas.microsoft.com/office/drawing/2014/main" id="{7DC96729-01FD-BCD1-73B7-1C1CC2007A08}"/>
+              </a:ext>
+            </a:extLst>
+          </p:cNvPr>
+          <p:cNvPicPr>
+            <a:picLocks noChangeAspect="1"/>
+          </p:cNvPicPr>
+          <p:nvPr/>
+        </p:nvPicPr>
+        <p:blipFill>
+          <a:blip>
+            <a:extLst>
+              <a:ext uri="{96DAC541-7B7A-43D3-8B79-37D633B846F1}">
+                <asvg:svgBlip xmlns:asvg="http://schemas.microsoft.com/office/drawing/2016/SVG/main" r:embed="rId4"/>
+              </a:ext>
+            </a:extLst>
+          </a:blip>
+          <a:stretch>
+            <a:fillRect/>
+          </a:stretch>
+        </p:blipFill>
+        <p:spPr>
+          <a:xfrm>
+            <a:off x="14348068" y="10229281"/>
+            <a:ext cx="1440000" cy="1440000"/>
+          </a:xfrm>
+          <a:prstGeom prst="rect">
+            <a:avLst/>
+          </a:prstGeom>
+        </p:spPr>
+      </p:pic>
+      <p:pic>
+        <p:nvPicPr>
+          <p:cNvPr id="8" name="グラフィックス 7">
+            <a:extLst>
+              <a:ext uri="{FF2B5EF4-FFF2-40B4-BE49-F238E27FC236}">
+                <a16:creationId xmlns:a16="http://schemas.microsoft.com/office/drawing/2014/main" id="{E522FE0C-DF3D-F075-D0D5-84352E243FA7}"/>
+              </a:ext>
+            </a:extLst>
+          </p:cNvPr>
+          <p:cNvPicPr>
+            <a:picLocks noChangeAspect="1"/>
+          </p:cNvPicPr>
+          <p:nvPr/>
+        </p:nvPicPr>
+        <p:blipFill>
+          <a:blip>
+            <a:extLst>
+              <a:ext uri="{96DAC541-7B7A-43D3-8B79-37D633B846F1}">
+                <asvg:svgBlip xmlns:asvg="http://schemas.microsoft.com/office/drawing/2016/SVG/main" r:embed="rId5"/>
+              </a:ext>
+            </a:extLst>
+          </a:blip>
+          <a:stretch>
+            <a:fillRect/>
+          </a:stretch>
+        </p:blipFill>
+        <p:spPr>
+          <a:xfrm>
+            <a:off x="11469881" y="1690687"/>
+            <a:ext cx="1440000" cy="1440000"/>
+          </a:xfrm>
+          <a:prstGeom prst="rect">
+            <a:avLst/>
+          </a:prstGeom>
+        </p:spPr>
+      </p:pic>
+      <p:pic>
+        <p:nvPicPr>
+          <p:cNvPr id="9" name="グラフィックス 8">
+            <a:extLst>
+              <a:ext uri="{FF2B5EF4-FFF2-40B4-BE49-F238E27FC236}">
+                <a16:creationId xmlns:a16="http://schemas.microsoft.com/office/drawing/2014/main" id="{A940BD57-6C7C-5A30-87EB-EE85A1DBB8C0}"/>
+              </a:ext>
+            </a:extLst>
+          </p:cNvPr>
+          <p:cNvPicPr>
+            <a:picLocks noChangeAspect="1"/>
+          </p:cNvPicPr>
+          <p:nvPr/>
+        </p:nvPicPr>
+        <p:blipFill>
+          <a:blip>
+            <a:extLst>
+              <a:ext uri="{96DAC541-7B7A-43D3-8B79-37D633B846F1}">
+                <asvg:svgBlip xmlns:asvg="http://schemas.microsoft.com/office/drawing/2016/SVG/main" r:embed="rId6"/>
+              </a:ext>
+            </a:extLst>
+          </a:blip>
+          <a:stretch>
+            <a:fillRect/>
+          </a:stretch>
+        </p:blipFill>
+        <p:spPr>
+          <a:xfrm>
+            <a:off x="7149882" y="4176885"/>
+            <a:ext cx="2160000" cy="2160000"/>
+          </a:xfrm>
+          <a:prstGeom prst="rect">
+            <a:avLst/>
+          </a:prstGeom>
+        </p:spPr>
+      </p:pic>
+      <p:cxnSp>
+        <p:nvCxnSpPr>
+          <p:cNvPr id="10" name="コネクタ: カギ線 9">
+            <a:extLst>
+              <a:ext uri="{FF2B5EF4-FFF2-40B4-BE49-F238E27FC236}">
+                <a16:creationId xmlns:a16="http://schemas.microsoft.com/office/drawing/2014/main" id="{51A3008E-6A9F-5086-F63A-863795834288}"/>
+              </a:ext>
+            </a:extLst>
+          </p:cNvPr>
+          <p:cNvCxnSpPr>
+            <a:cxnSpLocks/>
+            <a:stCxn id="7" idx="1"/>
+            <a:endCxn id="5" idx="3"/>
+          </p:cNvCxnSpPr>
+          <p:nvPr/>
+        </p:nvCxnSpPr>
+        <p:spPr>
+          <a:xfrm rot="10800000">
+            <a:off x="12909882" y="8103083"/>
+            <a:ext cx="1438187" cy="2846198"/>
+          </a:xfrm>
+          <a:prstGeom prst="bentConnector3">
+            <a:avLst/>
+          </a:prstGeom>
+          <a:ln w="76200">
+            <a:solidFill>
+              <a:schemeClr val="bg2"/>
+            </a:solidFill>
+            <a:tailEnd type="triangle"/>
+          </a:ln>
+        </p:spPr>
+        <p:style>
+          <a:lnRef idx="1">
+            <a:schemeClr val="accent1"/>
+          </a:lnRef>
+          <a:fillRef idx="0">
+            <a:schemeClr val="accent1"/>
+          </a:fillRef>
+          <a:effectRef idx="0">
+            <a:schemeClr val="accent1"/>
+          </a:effectRef>
+          <a:fontRef idx="minor">
+            <a:schemeClr val="tx1"/>
+          </a:fontRef>
+        </p:style>
+      </p:cxnSp>
+      <p:pic>
+        <p:nvPicPr>
+          <p:cNvPr id="11" name="グラフィックス 10">
+            <a:extLst>
+              <a:ext uri="{FF2B5EF4-FFF2-40B4-BE49-F238E27FC236}">
+                <a16:creationId xmlns:a16="http://schemas.microsoft.com/office/drawing/2014/main" id="{1C49E6CD-EF0B-AC43-5FA8-4EDA20221E18}"/>
+              </a:ext>
+            </a:extLst>
+          </p:cNvPr>
+          <p:cNvPicPr>
+            <a:picLocks noChangeAspect="1"/>
+          </p:cNvPicPr>
+          <p:nvPr/>
+        </p:nvPicPr>
+        <p:blipFill>
+          <a:blip>
+            <a:extLst>
+              <a:ext uri="{96DAC541-7B7A-43D3-8B79-37D633B846F1}">
+                <asvg:svgBlip xmlns:asvg="http://schemas.microsoft.com/office/drawing/2016/SVG/main" r:embed="rId7"/>
+              </a:ext>
+            </a:extLst>
+          </a:blip>
+          <a:stretch>
+            <a:fillRect/>
+          </a:stretch>
+        </p:blipFill>
+        <p:spPr>
+          <a:xfrm>
+            <a:off x="11469881" y="10229281"/>
+            <a:ext cx="1440000" cy="1440000"/>
+          </a:xfrm>
+          <a:prstGeom prst="rect">
+            <a:avLst/>
+          </a:prstGeom>
+        </p:spPr>
+      </p:pic>
+      <p:pic>
+        <p:nvPicPr>
+          <p:cNvPr id="12" name="グラフィックス 11">
+            <a:extLst>
+              <a:ext uri="{FF2B5EF4-FFF2-40B4-BE49-F238E27FC236}">
+                <a16:creationId xmlns:a16="http://schemas.microsoft.com/office/drawing/2014/main" id="{74D7D497-DB02-09C1-824E-33957D2BCD84}"/>
+              </a:ext>
+            </a:extLst>
+          </p:cNvPr>
+          <p:cNvPicPr>
+            <a:picLocks noChangeAspect="1"/>
+          </p:cNvPicPr>
+          <p:nvPr/>
+        </p:nvPicPr>
+        <p:blipFill>
+          <a:blip>
+            <a:extLst>
+              <a:ext uri="{96DAC541-7B7A-43D3-8B79-37D633B846F1}">
+                <asvg:svgBlip xmlns:asvg="http://schemas.microsoft.com/office/drawing/2016/SVG/main" r:embed="rId8"/>
+              </a:ext>
+            </a:extLst>
+          </a:blip>
+          <a:stretch>
+            <a:fillRect/>
+          </a:stretch>
+        </p:blipFill>
+        <p:spPr>
+          <a:xfrm>
+            <a:off x="11469881" y="4536885"/>
+            <a:ext cx="1440000" cy="1440000"/>
+          </a:xfrm>
+          <a:prstGeom prst="rect">
+            <a:avLst/>
+          </a:prstGeom>
+        </p:spPr>
+      </p:pic>
+      <p:cxnSp>
+        <p:nvCxnSpPr>
+          <p:cNvPr id="13" name="コネクタ: カギ線 12">
+            <a:extLst>
+              <a:ext uri="{FF2B5EF4-FFF2-40B4-BE49-F238E27FC236}">
+                <a16:creationId xmlns:a16="http://schemas.microsoft.com/office/drawing/2014/main" id="{6CBCA35B-ABCD-BD02-C107-38A51324CDBD}"/>
+              </a:ext>
+            </a:extLst>
+          </p:cNvPr>
+          <p:cNvCxnSpPr>
+            <a:cxnSpLocks/>
+            <a:stCxn id="5" idx="1"/>
+            <a:endCxn id="9" idx="3"/>
+          </p:cNvCxnSpPr>
+          <p:nvPr/>
+        </p:nvCxnSpPr>
+        <p:spPr>
+          <a:xfrm rot="10800000">
+            <a:off x="9309883" y="5256885"/>
+            <a:ext cx="2159999" cy="2846198"/>
+          </a:xfrm>
+          <a:prstGeom prst="bentConnector3">
+            <a:avLst/>
+          </a:prstGeom>
+          <a:ln w="76200">
+            <a:solidFill>
+              <a:schemeClr val="bg2"/>
+            </a:solidFill>
+            <a:headEnd type="triangle" w="med" len="med"/>
+            <a:tailEnd type="triangle" w="med" len="med"/>
+          </a:ln>
+        </p:spPr>
+        <p:style>
+          <a:lnRef idx="1">
+            <a:schemeClr val="accent1"/>
+          </a:lnRef>
+          <a:fillRef idx="0">
+            <a:schemeClr val="accent1"/>
+          </a:fillRef>
+          <a:effectRef idx="0">
+            <a:schemeClr val="accent1"/>
+          </a:effectRef>
+          <a:fontRef idx="minor">
+            <a:schemeClr val="tx1"/>
+          </a:fontRef>
+        </p:style>
+      </p:cxnSp>
+      <p:cxnSp>
+        <p:nvCxnSpPr>
+          <p:cNvPr id="14" name="直線矢印コネクタ 13">
+            <a:extLst>
+              <a:ext uri="{FF2B5EF4-FFF2-40B4-BE49-F238E27FC236}">
+                <a16:creationId xmlns:a16="http://schemas.microsoft.com/office/drawing/2014/main" id="{5665F72F-0E9C-93A9-29FB-1BC3EF398E73}"/>
+              </a:ext>
+            </a:extLst>
+          </p:cNvPr>
+          <p:cNvCxnSpPr>
+            <a:cxnSpLocks/>
+            <a:stCxn id="6" idx="1"/>
+            <a:endCxn id="5" idx="3"/>
+          </p:cNvCxnSpPr>
+          <p:nvPr/>
+        </p:nvCxnSpPr>
+        <p:spPr>
+          <a:xfrm flipH="1">
+            <a:off x="12909881" y="8103083"/>
+            <a:ext cx="1438187" cy="0"/>
+          </a:xfrm>
+          <a:prstGeom prst="straightConnector1">
+            <a:avLst/>
+          </a:prstGeom>
+          <a:ln w="76200">
+            <a:solidFill>
+              <a:schemeClr val="bg2"/>
+            </a:solidFill>
+            <a:headEnd type="triangle" w="med" len="med"/>
+            <a:tailEnd type="triangle" w="med" len="med"/>
+          </a:ln>
+        </p:spPr>
+        <p:style>
+          <a:lnRef idx="1">
+            <a:schemeClr val="accent1"/>
+          </a:lnRef>
+          <a:fillRef idx="0">
+            <a:schemeClr val="accent1"/>
+          </a:fillRef>
+          <a:effectRef idx="0">
+            <a:schemeClr val="accent1"/>
+          </a:effectRef>
+          <a:fontRef idx="minor">
+            <a:schemeClr val="tx1"/>
+          </a:fontRef>
+        </p:style>
+      </p:cxnSp>
+      <p:cxnSp>
+        <p:nvCxnSpPr>
+          <p:cNvPr id="15" name="コネクタ: カギ線 14">
+            <a:extLst>
+              <a:ext uri="{FF2B5EF4-FFF2-40B4-BE49-F238E27FC236}">
+                <a16:creationId xmlns:a16="http://schemas.microsoft.com/office/drawing/2014/main" id="{C5B81EFA-4947-66CF-F891-8299F25410FA}"/>
+              </a:ext>
+            </a:extLst>
+          </p:cNvPr>
+          <p:cNvCxnSpPr>
+            <a:cxnSpLocks/>
+            <a:stCxn id="8" idx="1"/>
+            <a:endCxn id="9" idx="3"/>
+          </p:cNvCxnSpPr>
+          <p:nvPr/>
+        </p:nvCxnSpPr>
+        <p:spPr>
+          <a:xfrm rot="10800000" flipV="1">
+            <a:off x="9309883" y="2410687"/>
+            <a:ext cx="2159999" cy="2846198"/>
+          </a:xfrm>
+          <a:prstGeom prst="bentConnector3">
+            <a:avLst>
+              <a:gd name="adj1" fmla="val 50000"/>
+            </a:avLst>
+          </a:prstGeom>
+          <a:ln w="76200">
+            <a:solidFill>
+              <a:schemeClr val="bg2"/>
+            </a:solidFill>
+            <a:headEnd type="triangle" w="med" len="med"/>
+            <a:tailEnd type="triangle" w="med" len="med"/>
+          </a:ln>
+        </p:spPr>
+        <p:style>
+          <a:lnRef idx="1">
+            <a:schemeClr val="accent1"/>
+          </a:lnRef>
+          <a:fillRef idx="0">
+            <a:schemeClr val="accent1"/>
+          </a:fillRef>
+          <a:effectRef idx="0">
+            <a:schemeClr val="accent1"/>
+          </a:effectRef>
+          <a:fontRef idx="minor">
+            <a:schemeClr val="tx1"/>
+          </a:fontRef>
+        </p:style>
+      </p:cxnSp>
+      <p:cxnSp>
+        <p:nvCxnSpPr>
+          <p:cNvPr id="16" name="直線矢印コネクタ 15">
+            <a:extLst>
+              <a:ext uri="{FF2B5EF4-FFF2-40B4-BE49-F238E27FC236}">
+                <a16:creationId xmlns:a16="http://schemas.microsoft.com/office/drawing/2014/main" id="{9A7801F3-E0BF-F538-5DE4-F6D6A9CBE102}"/>
+              </a:ext>
+            </a:extLst>
+          </p:cNvPr>
+          <p:cNvCxnSpPr>
+            <a:cxnSpLocks/>
+            <a:stCxn id="12" idx="1"/>
+            <a:endCxn id="9" idx="3"/>
+          </p:cNvCxnSpPr>
+          <p:nvPr/>
+        </p:nvCxnSpPr>
+        <p:spPr>
+          <a:xfrm flipH="1">
+            <a:off x="9309882" y="5256885"/>
+            <a:ext cx="2159999" cy="0"/>
+          </a:xfrm>
+          <a:prstGeom prst="straightConnector1">
+            <a:avLst/>
+          </a:prstGeom>
+          <a:ln w="76200">
+            <a:solidFill>
+              <a:schemeClr val="bg2"/>
+            </a:solidFill>
+            <a:headEnd type="triangle" w="med" len="med"/>
+            <a:tailEnd type="triangle" w="med" len="med"/>
+          </a:ln>
+        </p:spPr>
+        <p:style>
+          <a:lnRef idx="1">
+            <a:schemeClr val="accent1"/>
+          </a:lnRef>
+          <a:fillRef idx="0">
+            <a:schemeClr val="accent1"/>
+          </a:fillRef>
+          <a:effectRef idx="0">
+            <a:schemeClr val="accent1"/>
+          </a:effectRef>
+          <a:fontRef idx="minor">
+            <a:schemeClr val="tx1"/>
+          </a:fontRef>
+        </p:style>
+      </p:cxnSp>
+      <p:sp>
+        <p:nvSpPr>
+          <p:cNvPr id="17" name="テキスト ボックス 16">
+            <a:extLst>
+              <a:ext uri="{FF2B5EF4-FFF2-40B4-BE49-F238E27FC236}">
+                <a16:creationId xmlns:a16="http://schemas.microsoft.com/office/drawing/2014/main" id="{2E87E127-501D-495F-6FC0-34B4F7E95A68}"/>
+              </a:ext>
+            </a:extLst>
+          </p:cNvPr>
+          <p:cNvSpPr txBox="1"/>
+          <p:nvPr/>
+        </p:nvSpPr>
+        <p:spPr>
+          <a:xfrm>
+            <a:off x="11109881" y="3098776"/>
+            <a:ext cx="2160000" cy="646331"/>
+          </a:xfrm>
+          <a:prstGeom prst="rect">
+            <a:avLst/>
+          </a:prstGeom>
+          <a:noFill/>
+        </p:spPr>
+        <p:txBody>
+          <a:bodyPr wrap="square" rtlCol="0">
+            <a:spAutoFit/>
+          </a:bodyPr>
+          <a:lstStyle/>
+          <a:p>
+            <a:pPr algn="ctr"/>
+            <a:r>
+              <a:rPr kumimoji="1" lang="ja-JP" altLang="en-US" dirty="0"/>
+              <a:t>さくらの</a:t>
+            </a:r>
+            <a:br>
+              <a:rPr kumimoji="1" lang="en-US" altLang="ja-JP" dirty="0"/>
+            </a:br>
+            <a:r>
+              <a:rPr kumimoji="1" lang="ja-JP" altLang="en-US" dirty="0"/>
+              <a:t>レンタルサーバ</a:t>
+            </a:r>
+          </a:p>
+        </p:txBody>
+      </p:sp>
+      <p:sp>
+        <p:nvSpPr>
+          <p:cNvPr id="18" name="テキスト ボックス 17">
+            <a:extLst>
+              <a:ext uri="{FF2B5EF4-FFF2-40B4-BE49-F238E27FC236}">
+                <a16:creationId xmlns:a16="http://schemas.microsoft.com/office/drawing/2014/main" id="{08AD9044-79AA-2BF3-A59C-139D0BB2000A}"/>
+              </a:ext>
+            </a:extLst>
+          </p:cNvPr>
+          <p:cNvSpPr txBox="1"/>
+          <p:nvPr/>
+        </p:nvSpPr>
+        <p:spPr>
+          <a:xfrm>
+            <a:off x="12189881" y="5996819"/>
+            <a:ext cx="2160000" cy="646331"/>
+          </a:xfrm>
+          <a:prstGeom prst="rect">
+            <a:avLst/>
+          </a:prstGeom>
+          <a:noFill/>
+        </p:spPr>
+        <p:txBody>
+          <a:bodyPr wrap="square" rtlCol="0">
+            <a:spAutoFit/>
+          </a:bodyPr>
+          <a:lstStyle/>
+          <a:p>
+            <a:pPr algn="ctr"/>
+            <a:r>
+              <a:rPr kumimoji="1" lang="ja-JP" altLang="en-US" dirty="0"/>
+              <a:t>オブジェクト</a:t>
+            </a:r>
+            <a:br>
+              <a:rPr kumimoji="1" lang="en-US" altLang="ja-JP" dirty="0"/>
+            </a:br>
+            <a:r>
+              <a:rPr kumimoji="1" lang="ja-JP" altLang="en-US" dirty="0"/>
+              <a:t>ストレージ</a:t>
+            </a:r>
+          </a:p>
+        </p:txBody>
+      </p:sp>
+      <p:cxnSp>
+        <p:nvCxnSpPr>
+          <p:cNvPr id="19" name="直線矢印コネクタ 18">
+            <a:extLst>
+              <a:ext uri="{FF2B5EF4-FFF2-40B4-BE49-F238E27FC236}">
+                <a16:creationId xmlns:a16="http://schemas.microsoft.com/office/drawing/2014/main" id="{BEA994B3-D82B-D8D6-55F0-9174BB4C50E6}"/>
+              </a:ext>
+            </a:extLst>
+          </p:cNvPr>
+          <p:cNvCxnSpPr>
+            <a:cxnSpLocks/>
+            <a:stCxn id="5" idx="0"/>
+            <a:endCxn id="12" idx="2"/>
+          </p:cNvCxnSpPr>
+          <p:nvPr/>
+        </p:nvCxnSpPr>
+        <p:spPr>
+          <a:xfrm flipV="1">
+            <a:off x="12189881" y="5976885"/>
+            <a:ext cx="0" cy="1406198"/>
+          </a:xfrm>
+          <a:prstGeom prst="straightConnector1">
+            <a:avLst/>
+          </a:prstGeom>
+          <a:ln w="76200">
+            <a:solidFill>
+              <a:schemeClr val="bg2"/>
+            </a:solidFill>
+            <a:headEnd type="triangle" w="med" len="med"/>
+            <a:tailEnd type="triangle" w="med" len="med"/>
+          </a:ln>
+        </p:spPr>
+        <p:style>
+          <a:lnRef idx="1">
+            <a:schemeClr val="accent1"/>
+          </a:lnRef>
+          <a:fillRef idx="0">
+            <a:schemeClr val="accent1"/>
+          </a:fillRef>
+          <a:effectRef idx="0">
+            <a:schemeClr val="accent1"/>
+          </a:effectRef>
+          <a:fontRef idx="minor">
+            <a:schemeClr val="tx1"/>
+          </a:fontRef>
+        </p:style>
+      </p:cxnSp>
+      <p:sp>
+        <p:nvSpPr>
+          <p:cNvPr id="20" name="テキスト ボックス 19">
+            <a:extLst>
+              <a:ext uri="{FF2B5EF4-FFF2-40B4-BE49-F238E27FC236}">
+                <a16:creationId xmlns:a16="http://schemas.microsoft.com/office/drawing/2014/main" id="{F04A8B08-D24B-99DB-FEEB-E5098440177B}"/>
+              </a:ext>
+            </a:extLst>
+          </p:cNvPr>
+          <p:cNvSpPr txBox="1"/>
+          <p:nvPr/>
+        </p:nvSpPr>
+        <p:spPr>
+          <a:xfrm>
+            <a:off x="10023608" y="8813752"/>
+            <a:ext cx="2160000" cy="369332"/>
+          </a:xfrm>
+          <a:prstGeom prst="rect">
+            <a:avLst/>
+          </a:prstGeom>
+          <a:noFill/>
+        </p:spPr>
+        <p:txBody>
+          <a:bodyPr wrap="square" rtlCol="0">
+            <a:spAutoFit/>
+          </a:bodyPr>
+          <a:lstStyle/>
+          <a:p>
+            <a:pPr algn="ctr"/>
+            <a:r>
+              <a:rPr kumimoji="1" lang="en-US" altLang="ja-JP" dirty="0" err="1"/>
+              <a:t>AppRun</a:t>
+            </a:r>
+            <a:r>
+              <a:rPr kumimoji="1" lang="ja-JP" altLang="en-US" dirty="0"/>
+              <a:t>共用型</a:t>
+            </a:r>
+          </a:p>
+        </p:txBody>
+      </p:sp>
+      <p:sp>
+        <p:nvSpPr>
+          <p:cNvPr id="21" name="テキスト ボックス 20">
+            <a:extLst>
+              <a:ext uri="{FF2B5EF4-FFF2-40B4-BE49-F238E27FC236}">
+                <a16:creationId xmlns:a16="http://schemas.microsoft.com/office/drawing/2014/main" id="{4BDE2633-1D8E-EEA2-C61D-06E780C19E46}"/>
+              </a:ext>
+            </a:extLst>
+          </p:cNvPr>
+          <p:cNvSpPr txBox="1"/>
+          <p:nvPr/>
+        </p:nvSpPr>
+        <p:spPr>
+          <a:xfrm>
+            <a:off x="11109881" y="11669281"/>
+            <a:ext cx="2160000" cy="646331"/>
+          </a:xfrm>
+          <a:prstGeom prst="rect">
+            <a:avLst/>
+          </a:prstGeom>
+          <a:noFill/>
+        </p:spPr>
+        <p:txBody>
+          <a:bodyPr wrap="square" rtlCol="0">
+            <a:spAutoFit/>
+          </a:bodyPr>
+          <a:lstStyle/>
+          <a:p>
+            <a:pPr algn="ctr"/>
+            <a:r>
+              <a:rPr kumimoji="1" lang="ja-JP" altLang="en-US" dirty="0"/>
+              <a:t>モニタリング</a:t>
+            </a:r>
+            <a:br>
+              <a:rPr kumimoji="1" lang="en-US" altLang="ja-JP" dirty="0"/>
+            </a:br>
+            <a:r>
+              <a:rPr kumimoji="1" lang="ja-JP" altLang="en-US" dirty="0"/>
+              <a:t>スイート</a:t>
+            </a:r>
+          </a:p>
+        </p:txBody>
+      </p:sp>
+      <p:sp>
+        <p:nvSpPr>
+          <p:cNvPr id="22" name="テキスト ボックス 21">
+            <a:extLst>
+              <a:ext uri="{FF2B5EF4-FFF2-40B4-BE49-F238E27FC236}">
+                <a16:creationId xmlns:a16="http://schemas.microsoft.com/office/drawing/2014/main" id="{5122F321-7C0D-8ED7-4C52-DBDFCA3C5BC0}"/>
+              </a:ext>
+            </a:extLst>
+          </p:cNvPr>
+          <p:cNvSpPr txBox="1"/>
+          <p:nvPr/>
+        </p:nvSpPr>
+        <p:spPr>
+          <a:xfrm>
+            <a:off x="13988068" y="11669281"/>
+            <a:ext cx="2160000" cy="646331"/>
+          </a:xfrm>
+          <a:prstGeom prst="rect">
+            <a:avLst/>
+          </a:prstGeom>
+          <a:noFill/>
+        </p:spPr>
+        <p:txBody>
+          <a:bodyPr wrap="square" rtlCol="0">
+            <a:spAutoFit/>
+          </a:bodyPr>
+          <a:lstStyle/>
+          <a:p>
+            <a:pPr algn="ctr"/>
+            <a:r>
+              <a:rPr kumimoji="1" lang="ja-JP" altLang="en-US" dirty="0"/>
+              <a:t>コンテナ</a:t>
+            </a:r>
+            <a:br>
+              <a:rPr kumimoji="1" lang="en-US" altLang="ja-JP" dirty="0"/>
+            </a:br>
+            <a:r>
+              <a:rPr kumimoji="1" lang="ja-JP" altLang="en-US" dirty="0"/>
+              <a:t>レジストリ</a:t>
+            </a:r>
+          </a:p>
+        </p:txBody>
+      </p:sp>
+      <p:sp>
+        <p:nvSpPr>
+          <p:cNvPr id="23" name="テキスト ボックス 22">
+            <a:extLst>
+              <a:ext uri="{FF2B5EF4-FFF2-40B4-BE49-F238E27FC236}">
+                <a16:creationId xmlns:a16="http://schemas.microsoft.com/office/drawing/2014/main" id="{E0FAB9D4-8F6A-64C2-8D67-9132DA54ED87}"/>
+              </a:ext>
+            </a:extLst>
+          </p:cNvPr>
+          <p:cNvSpPr txBox="1"/>
+          <p:nvPr/>
+        </p:nvSpPr>
+        <p:spPr>
+          <a:xfrm>
+            <a:off x="15072529" y="8817476"/>
+            <a:ext cx="2160000" cy="369332"/>
+          </a:xfrm>
+          <a:prstGeom prst="rect">
+            <a:avLst/>
+          </a:prstGeom>
+          <a:noFill/>
+        </p:spPr>
+        <p:txBody>
+          <a:bodyPr wrap="square" rtlCol="0">
+            <a:spAutoFit/>
+          </a:bodyPr>
+          <a:lstStyle/>
+          <a:p>
+            <a:pPr algn="ctr"/>
+            <a:r>
+              <a:rPr kumimoji="1" lang="ja-JP" altLang="en-US" dirty="0"/>
+              <a:t>高火力 </a:t>
+            </a:r>
+            <a:r>
+              <a:rPr kumimoji="1" lang="en-US" altLang="ja-JP" dirty="0"/>
+              <a:t>DOK</a:t>
+            </a:r>
+            <a:endParaRPr kumimoji="1" lang="ja-JP" altLang="en-US" dirty="0"/>
+          </a:p>
+        </p:txBody>
+      </p:sp>
+      <p:cxnSp>
+        <p:nvCxnSpPr>
+          <p:cNvPr id="24" name="直線矢印コネクタ 23">
+            <a:extLst>
+              <a:ext uri="{FF2B5EF4-FFF2-40B4-BE49-F238E27FC236}">
+                <a16:creationId xmlns:a16="http://schemas.microsoft.com/office/drawing/2014/main" id="{BEF72F5E-CE1A-9E0E-3601-3311B5F1A2B8}"/>
+              </a:ext>
+            </a:extLst>
+          </p:cNvPr>
+          <p:cNvCxnSpPr>
+            <a:cxnSpLocks/>
+            <a:stCxn id="7" idx="0"/>
+            <a:endCxn id="6" idx="2"/>
+          </p:cNvCxnSpPr>
+          <p:nvPr/>
+        </p:nvCxnSpPr>
+        <p:spPr>
+          <a:xfrm flipV="1">
+            <a:off x="15068068" y="8823083"/>
+            <a:ext cx="0" cy="1406198"/>
+          </a:xfrm>
+          <a:prstGeom prst="straightConnector1">
+            <a:avLst/>
+          </a:prstGeom>
+          <a:ln w="76200">
+            <a:solidFill>
+              <a:schemeClr val="bg2"/>
+            </a:solidFill>
+            <a:tailEnd type="triangle"/>
+          </a:ln>
+        </p:spPr>
+        <p:style>
+          <a:lnRef idx="1">
+            <a:schemeClr val="accent1"/>
+          </a:lnRef>
+          <a:fillRef idx="0">
+            <a:schemeClr val="accent1"/>
+          </a:fillRef>
+          <a:effectRef idx="0">
+            <a:schemeClr val="accent1"/>
+          </a:effectRef>
+          <a:fontRef idx="minor">
+            <a:schemeClr val="tx1"/>
+          </a:fontRef>
+        </p:style>
+      </p:cxnSp>
+      <p:cxnSp>
+        <p:nvCxnSpPr>
+          <p:cNvPr id="25" name="直線矢印コネクタ 24">
+            <a:extLst>
+              <a:ext uri="{FF2B5EF4-FFF2-40B4-BE49-F238E27FC236}">
+                <a16:creationId xmlns:a16="http://schemas.microsoft.com/office/drawing/2014/main" id="{EB44ECEB-367D-086D-8E15-97D80659D6AB}"/>
+              </a:ext>
+            </a:extLst>
+          </p:cNvPr>
+          <p:cNvCxnSpPr>
+            <a:cxnSpLocks/>
+            <a:stCxn id="5" idx="2"/>
+            <a:endCxn id="11" idx="0"/>
+          </p:cNvCxnSpPr>
+          <p:nvPr/>
+        </p:nvCxnSpPr>
+        <p:spPr>
+          <a:xfrm>
+            <a:off x="12189881" y="8823083"/>
+            <a:ext cx="0" cy="1406198"/>
+          </a:xfrm>
+          <a:prstGeom prst="straightConnector1">
+            <a:avLst/>
+          </a:prstGeom>
+          <a:ln w="76200">
+            <a:solidFill>
+              <a:schemeClr val="bg2"/>
+            </a:solidFill>
+            <a:tailEnd type="triangle"/>
+          </a:ln>
+        </p:spPr>
+        <p:style>
+          <a:lnRef idx="1">
+            <a:schemeClr val="accent1"/>
+          </a:lnRef>
+          <a:fillRef idx="0">
+            <a:schemeClr val="accent1"/>
+          </a:fillRef>
+          <a:effectRef idx="0">
+            <a:schemeClr val="accent1"/>
+          </a:effectRef>
+          <a:fontRef idx="minor">
+            <a:schemeClr val="tx1"/>
+          </a:fontRef>
+        </p:style>
+      </p:cxnSp>
+      <p:cxnSp>
+        <p:nvCxnSpPr>
+          <p:cNvPr id="27" name="コネクタ: カギ線 26">
+            <a:extLst>
+              <a:ext uri="{FF2B5EF4-FFF2-40B4-BE49-F238E27FC236}">
+                <a16:creationId xmlns:a16="http://schemas.microsoft.com/office/drawing/2014/main" id="{16338569-8FAB-7CA5-AE13-4256CAF8AB42}"/>
+              </a:ext>
+            </a:extLst>
+          </p:cNvPr>
+          <p:cNvCxnSpPr>
+            <a:stCxn id="6" idx="0"/>
+          </p:cNvCxnSpPr>
+          <p:nvPr/>
+        </p:nvCxnSpPr>
+        <p:spPr>
+          <a:xfrm rot="16200000" flipV="1">
+            <a:off x="12925876" y="5240890"/>
+            <a:ext cx="2126198" cy="2158187"/>
+          </a:xfrm>
+          <a:prstGeom prst="bentConnector2">
+            <a:avLst/>
+          </a:prstGeom>
+          <a:ln w="76200">
+            <a:solidFill>
+              <a:schemeClr val="bg2"/>
+            </a:solidFill>
+            <a:headEnd type="triangle" w="med" len="med"/>
+            <a:tailEnd type="triangle" w="med" len="med"/>
+          </a:ln>
+        </p:spPr>
+        <p:style>
+          <a:lnRef idx="1">
+            <a:schemeClr val="accent1"/>
+          </a:lnRef>
+          <a:fillRef idx="0">
+            <a:schemeClr val="accent1"/>
+          </a:fillRef>
+          <a:effectRef idx="0">
+            <a:schemeClr val="accent1"/>
+          </a:effectRef>
+          <a:fontRef idx="minor">
+            <a:schemeClr val="tx1"/>
+          </a:fontRef>
+        </p:style>
+      </p:cxnSp>
     </p:spTree>
     <p:extLst>
       <p:ext uri="{BB962C8B-B14F-4D97-AF65-F5344CB8AC3E}">
